--- a/analyses-project/guidance/W4_Storyboard_and_outline.pptx
+++ b/analyses-project/guidance/W4_Storyboard_and_outline.pptx
@@ -5477,7 +5477,7 @@
                 <a:ea typeface="Calibri" pitchFamily="34" charset="-122"/>
                 <a:cs typeface="Calibri" pitchFamily="34" charset="-120"/>
               </a:rPr>
-              <a:t>Analysis slides: </a:t>
+              <a:t>Adapt sections 4–5 to </a:t>
             </a:r>
             <a:r>
               <a:rPr lang="en-US" sz="1350" b="1" dirty="0">
@@ -5488,7 +5488,7 @@
                 <a:ea typeface="Calibri" pitchFamily="34" charset="-122"/>
                 <a:cs typeface="Calibri" pitchFamily="34" charset="-120"/>
               </a:rPr>
-              <a:t>04 Choose your question</a:t>
+              <a:t>your</a:t>
             </a:r>
             <a:r>
               <a:rPr lang="en-US" sz="1350" dirty="0">
@@ -5499,29 +5499,7 @@
                 <a:ea typeface="Calibri" pitchFamily="34" charset="-122"/>
                 <a:cs typeface="Calibri" pitchFamily="34" charset="-120"/>
               </a:rPr>
-              <a:t> and </a:t>
-            </a:r>
-            <a:r>
-              <a:rPr lang="en-US" sz="1350" b="1" dirty="0">
-                <a:solidFill>
-                  <a:srgbClr val="222B36"/>
-                </a:solidFill>
-                <a:latin typeface="Calibri" pitchFamily="34" charset="0"/>
-                <a:ea typeface="Calibri" pitchFamily="34" charset="-122"/>
-                <a:cs typeface="Calibri" pitchFamily="34" charset="-120"/>
-              </a:rPr>
-              <a:t>05 Build the evidence</a:t>
-            </a:r>
-            <a:r>
-              <a:rPr lang="en-US" sz="1350" dirty="0">
-                <a:solidFill>
-                  <a:srgbClr val="222B36"/>
-                </a:solidFill>
-                <a:latin typeface="Calibri" pitchFamily="34" charset="0"/>
-                <a:ea typeface="Calibri" pitchFamily="34" charset="-122"/>
-                <a:cs typeface="Calibri" pitchFamily="34" charset="-120"/>
-              </a:rPr>
-              <a:t>.</a:t>
+              <a:t> region, cloud level or season (change VARIABLE or REGIONS).</a:t>
             </a:r>
             <a:endParaRPr lang="en-US" sz="1350" dirty="0"/>
           </a:p>
